--- a/presentations/larsen-dietls-crisis-slides.pptx
+++ b/presentations/larsen-dietls-crisis-slides.pptx
@@ -3427,7 +3427,7 @@
                 </a:solidFill>
                 <a:latin typeface="Inter"/>
               </a:rPr>
-              <a:t>Faculty Mentor  ·  Christopher D. Thom, MD</a:t>
+              <a:t>Faculty Mentor  ·  Christopher Thom, MD, RDMS</a:t>
             </a:r>
           </a:p>
         </p:txBody>
@@ -3466,7 +3466,7 @@
                 </a:solidFill>
                 <a:latin typeface="Inter"/>
               </a:rPr>
-              <a:t>Co-authors  ·  Matthew Kongkatong, MD  ·  Jakob Ottenhoff, DO  ·  James Moak, MD</a:t>
+              <a:t>Co-authors  ·  Matthew Kongkatong, MD  ·  Jakob Ottenhoff, DO  ·  James Moak, MD, RDMS</a:t>
             </a:r>
           </a:p>
         </p:txBody>
@@ -4550,7 +4550,7 @@
                 </a:solidFill>
                 <a:latin typeface="Inter"/>
               </a:rPr>
-              <a:t>•  Pediatric patients with recurrent episodic abdominal pain + vomiting.</a:t>
+              <a:t>•  Case 1: 14-year-old male, vomiting + left flank pain, several years of episodic vomiting.</a:t>
             </a:r>
           </a:p>
           <a:p>
@@ -4582,7 +4582,7 @@
                 </a:solidFill>
                 <a:latin typeface="Inter"/>
               </a:rPr>
-              <a:t>•  Both had prior gastroenterology workup labeled as cyclic vomiting.</a:t>
+              <a:t>•  Case 2: 5-year-old female, abdominal pain + vomiting, ~1 year of episodes.</a:t>
             </a:r>
           </a:p>
           <a:p>
@@ -4614,7 +4614,7 @@
                 </a:solidFill>
                 <a:latin typeface="Inter"/>
               </a:rPr>
-              <a:t>•  Symptoms episodic and often unprovoked; normal findings between episodes.</a:t>
+              <a:t>•  Both carried prior diagnoses: cyclic vomiting syndrome (and abdominal migraine in Case 2).</a:t>
             </a:r>
           </a:p>
           <a:p>
@@ -4646,7 +4646,7 @@
                 </a:solidFill>
                 <a:latin typeface="Inter"/>
               </a:rPr>
-              <a:t>•  Hematuria absent in both — clinical picture looked GI, not urologic.</a:t>
+              <a:t>•  Multiple primary-care, GI clinic, and ED visits before correct diagnosis.</a:t>
             </a:r>
           </a:p>
           <a:p>
@@ -4678,7 +4678,7 @@
                 </a:solidFill>
                 <a:latin typeface="Inter"/>
               </a:rPr>
-              <a:t>•  Suspicion for Dietl's emerged in the ED on a recurrent visit.</a:t>
+              <a:t>•  Urinalysis and serologic studies normal in both.</a:t>
             </a:r>
           </a:p>
         </p:txBody>
@@ -7675,7 +7675,7 @@
                 </a:solidFill>
                 <a:latin typeface="Inter"/>
               </a:rPr>
-              <a:t>Larsen M, Kongkatong M, Ottenhoff J, Moak J.   Faculty: Christopher D. Thom, MD.</a:t>
+              <a:t>Larsen M, Kongkatong M, Ottenhoff J, Moak J.   Faculty: Christopher Thom, MD, RDMS.</a:t>
             </a:r>
           </a:p>
         </p:txBody>
